--- a/public/fun/pack/pptx/reviewpro/보장점검양식프리미엄_02_부부점검_블러시샴페인.pptx
+++ b/public/fun/pack/pptx/reviewpro/보장점검양식프리미엄_02_부부점검_블러시샴페인.pptx
@@ -112,12 +112,12 @@
   <p:extLst>
     <p:ext uri="{521415D9-36F7-43E2-AB2F-B90AF26B5E84}">
       <p14:sectionLst xmlns:p14="http://schemas.microsoft.com/office/powerpoint/2010/main">
-        <p14:section name="시작" id="{91FFCAAB-F9CC-4EE0-8016-B5CF0F504166}">
+        <p14:section name="시작" id="{8D585257-2FE9-43D8-B47C-AD8BBDFFDAB3}">
           <p14:sldIdLst>
             <p14:sldId id="256"/>
           </p14:sldIdLst>
         </p14:section>
-        <p14:section name="본문" id="{7C9C5BA0-CD19-404E-A3CD-6515F7C81FA9}">
+        <p14:section name="본문" id="{22B02E8E-B44A-4568-9C8F-B5D26EA8EF0C}">
           <p14:sldIdLst>
             <p14:sldId id="257"/>
             <p14:sldId id="258"/>
@@ -1510,7 +1510,7 @@
             </a:lvl1pPr>
           </a:lstStyle>
           <a:p>
-            <a:fld id="{B22E6939-CA15-4693-8784-501D9B22ABC4}" type="slidenum">
+            <a:fld id="{34A9B0AC-3E26-40C3-9661-E03C959004A0}" type="slidenum">
               <a:rPr lang="en-US"/>
               <a:t>‹#›</a:t>
             </a:fld>
@@ -2126,7 +2126,7 @@
             </a:lvl1pPr>
           </a:lstStyle>
           <a:p>
-            <a:fld id="{35B24ADA-C150-40E9-8D09-A32765C95D56}" type="slidenum">
+            <a:fld id="{96EFE860-0C90-452E-BBC5-DFE1289E00F4}" type="slidenum">
               <a:rPr lang="en-US"/>
               <a:t>‹#›</a:t>
             </a:fld>
@@ -2804,7 +2804,7 @@
             </a:lvl1pPr>
           </a:lstStyle>
           <a:p>
-            <a:fld id="{1FDED482-87F6-427D-94CA-1DBB1864D995}" type="slidenum">
+            <a:fld id="{41C928F7-D5E1-495D-AC38-205F08E900B5}" type="slidenum">
               <a:rPr lang="en-US"/>
               <a:t>‹#›</a:t>
             </a:fld>
@@ -3667,7 +3667,7 @@
           <a:p>
             <a:r>
               <a:rPr lang="ko-KR"/>
-              <a:t>부부 점검 · 0000. 00. 00</a:t>
+              <a:t>부부 점검 · 날짜 입력</a:t>
             </a:r>
           </a:p>
           <a:p>
@@ -3758,7 +3758,7 @@
           <a:bodyPr/>
           <a:lstStyle/>
           <a:p>
-            <a:fld id="{749BB5EF-E7CD-4592-8E1E-3E4BC0567E67}" type="slidenum">
+            <a:fld id="{98A8C12E-30D0-43E7-BF25-901CD0E235D2}" type="slidenum">
               <a:rPr lang="en-US"/>
               <a:t>‹#›</a:t>
             </a:fld>
@@ -4471,7 +4471,7 @@
           <a:bodyPr/>
           <a:lstStyle/>
           <a:p>
-            <a:fld id="{F3F377F0-D5FA-4A78-944B-19049A6F2DC7}" type="slidenum">
+            <a:fld id="{005F5E88-7365-46D5-83AF-C2026789FC27}" type="slidenum">
               <a:rPr lang="en-US"/>
               <a:t>‹#›</a:t>
             </a:fld>
@@ -5977,7 +5977,7 @@
           <a:bodyPr/>
           <a:lstStyle/>
           <a:p>
-            <a:fld id="{C5B32720-C624-4698-8E46-4A9615CE2C53}" type="slidenum">
+            <a:fld id="{8F04B6ED-CF2E-46CE-8C0B-62997336F517}" type="slidenum">
               <a:rPr lang="en-US"/>
               <a:t>‹#›</a:t>
             </a:fld>
@@ -7527,7 +7527,7 @@
           <a:bodyPr/>
           <a:lstStyle/>
           <a:p>
-            <a:fld id="{B38BDC7F-2610-4ADB-BA1E-F4DAC8CB7135}" type="slidenum">
+            <a:fld id="{CC4E4F9E-8CDE-4582-9FDD-B303364DDE21}" type="slidenum">
               <a:rPr lang="en-US"/>
               <a:t>‹#›</a:t>
             </a:fld>
@@ -8473,7 +8473,7 @@
           <a:bodyPr/>
           <a:lstStyle/>
           <a:p>
-            <a:fld id="{9C42C89A-4DFD-4605-8103-549F3D63442A}" type="slidenum">
+            <a:fld id="{83C75516-D5FC-464A-B36A-C95AAD8E761E}" type="slidenum">
               <a:rPr lang="en-US"/>
               <a:t>‹#›</a:t>
             </a:fld>
